--- a/dist/초5/사회·역사/국토와생활/초5_사회·역사_국토와생활_01_우리나라의위치와영역_학생용.pptx
+++ b/dist/초5/사회·역사/국토와생활/초5_사회·역사_국토와생활_01_우리나라의위치와영역_학생용.pptx
@@ -120,13 +120,13 @@
   <p:extLst>
     <p:ext uri="{521415D9-36F7-43E2-AB2F-B90AF26B5E84}">
       <p14:sectionLst xmlns:p14="http://schemas.microsoft.com/office/powerpoint/2010/main">
-        <p14:section name="도입" id="{ff9b0f47-5c5a-b739-1a00-60cc7a7ba4b6}">
+        <p14:section name="도입" id="{44968572-a1b3-cba4-3b47-ad6c89a3983e}">
           <p14:sldIdLst>
             <p14:sldId id="256"/>
             <p14:sldId id="257"/>
           </p14:sldIdLst>
         </p14:section>
-        <p14:section name="개념" id="{5f17fe6b-7091-e933-10eb-8bcabb11b0be}">
+        <p14:section name="개념" id="{3b3670dc-783d-10a0-48bc-1ebbabbe8bff}">
           <p14:sldIdLst>
             <p14:sldId id="258"/>
             <p14:sldId id="259"/>
@@ -134,7 +134,7 @@
             <p14:sldId id="262"/>
           </p14:sldIdLst>
         </p14:section>
-        <p14:section name="연습" id="{ebc43a6e-b1f3-c1eb-5cab-5c1a4b7b2109}">
+        <p14:section name="연습" id="{ca34642f-0511-8505-4a2a-ec3460dc771f}">
           <p14:sldIdLst>
             <p14:sldId id="260"/>
             <p14:sldId id="263"/>
@@ -142,24 +142,24 @@
             <p14:sldId id="265"/>
           </p14:sldIdLst>
         </p14:section>
-        <p14:section name="개념" id="{58a8c5cc-cff5-c0c1-c022-64dc4a879ee5}">
+        <p14:section name="개념" id="{e16ebaf6-3251-9ec4-8f3f-6a4086e68c3a}">
           <p14:sldIdLst/>
         </p14:section>
-        <p14:section name="연습" id="{964bc8ff-b0e3-7e45-3a35-1435c7df6409}">
+        <p14:section name="연습" id="{e1305167-3f7a-e1c3-9671-2a7198820a70}">
           <p14:sldIdLst/>
         </p14:section>
-        <p14:section name="확인" id="{92dde781-861c-6f85-1524-71a393eafef8}">
+        <p14:section name="확인" id="{7232870a-24c3-f1e7-d3e3-4d5339b34d27}">
           <p14:sldIdLst>
             <p14:sldId id="266"/>
             <p14:sldId id="267"/>
           </p14:sldIdLst>
         </p14:section>
-        <p14:section name="정리" id="{9f73a769-6ba0-975c-899c-00b32743f43f}">
+        <p14:section name="정리" id="{03b815bf-266f-923d-c6bd-eff4342a9f4f}">
           <p14:sldIdLst>
             <p14:sldId id="268"/>
           </p14:sldIdLst>
         </p14:section>
-        <p14:section name="보충" id="{b0e70a40-31fb-08f9-2f60-c50f004cb9dd}">
+        <p14:section name="보충" id="{f5a64f4b-4a54-f9f6-6d3e-2b5970d4c7a7}">
           <p14:sldIdLst>
             <p14:sldId id="269"/>
           </p14:sldIdLst>
